--- a/slides/talk-perception/talk-perception.pptx
+++ b/slides/talk-perception/talk-perception.pptx
@@ -541,7 +541,7 @@
           <a:lstStyle/>
           <a:p>
             <a:r>
-              <a:t>이 발표는 travplan 리서치 문서 가운데 인식 문서와 센서 배치 문서를 한 이야기로 묶은 것입니다. 문서는 여덟 탭이지만, 발표에서는 지형 지도, traversability, 시각 기반 모델과 동적 장애물, 최근 연구 비교, 작업 기록, 센서 배치 순서로 갑니다. 수치는 모두 문서와 STATE.md에 적힌 것만 썼고, travplan 결과에는 TP 번호를 달았습니다.</a:t>
+              <a:t>이 발표는 travplan 리서치 문서 가운데 인식 문서와 센서 배치 문서를 하나의 이야기로 엮은 것입니다. 문서는 여덟 탭이지만, 발표에서는 지형 지도, traversability, 비전 파운데이션 모델과 동적 장애물, 최근 연구 비교, 작업 기록, 센서 배치 순서로 갑니다. 수치는 모두 문서와 STATE.md에 적힌 것만 썼고, travplan 결과에는 TP 번호를 달았습니다.</a:t>
             </a:r>
           </a:p>
         </p:txBody>
@@ -681,7 +681,7 @@
           <a:lstStyle/>
           <a:p>
             <a:r>
-              <a:t>두 번째 묶음은 traversability 추정입니다. 이 땅을 이 로봇이 지나갈 수 있는가를 비용으로 바꾸는 일입니다. travplan은 지금 경사, 턱, 거칠기 같은 기하 특징으로 비용을 계산하고, TravNet으로 로봇이 몸으로 느낀 경험을 학습해 고치려 합니다. 같은 문제를 먼저 푼 오프로드 연구들을 봅니다.</a:t>
+              <a:t>두 번째 절은 traversability 추정입니다. 이 땅을 이 로봇이 지나갈 수 있는가를 비용으로 바꾸는 일입니다. travplan은 지금 경사, 턱, 거칠기 같은 기하 특징으로 비용을 계산하고, TravNet으로 로봇이 몸으로 느낀 경험을 학습해 고치려 합니다. 같은 문제를 먼저 푼 오프로드 연구들을 살펴봅니다.</a:t>
             </a:r>
           </a:p>
         </p:txBody>
@@ -751,7 +751,7 @@
           <a:lstStyle/>
           <a:p>
             <a:r>
-              <a:t>traversability 라벨은 사람이 단 의미 라벨에서, 로봇이 실제로 겪은 사건으로 옮겨 왔습니다. RELLIS-3D는 도시용 분할 모델이 오프로드에서 무너진다는 것을 보였고, BADGR은 충돌과 충격 같은 사건을 라벨로 삼았습니다. 기하만 보는 로봇은 키 큰 풀밭을 벽으로 보지만, 사건 라벨은 실제로 지나갈 수 있다는 것을 배웁니다. BADGR의 사건 예측과 표본 기반 계획은 TravNet과 MPPI 조합과 구조가 같아서 travplan의 원형으로 봅니다.</a:t>
+              <a:t>traversability 라벨은 사람이 단 의미 라벨에서, 로봇이 실제로 겪은 사건으로 옮겨 왔습니다. RELLIS-3D는 도시용 분할 모델이 오프로드에서 무너진다는 것을 보여 줬고, BADGR은 충돌과 충격 같은 사건을 라벨로 삼았습니다. 기하만 보는 로봇은 키 큰 풀밭을 벽으로 보지만, 사건 라벨은 실제로 지나갈 수 있다는 것을 배웁니다. BADGR의 사건 예측과 샘플 기반 계획은 TravNet과 MPPI 조합과 구조가 같아서 travplan의 원형으로 봅니다.</a:t>
             </a:r>
           </a:p>
         </p:txBody>
@@ -821,7 +821,7 @@
           <a:lstStyle/>
           <a:p>
             <a:r>
-              <a:t>자기지도 traversability는 지나간 자리만 양성이고, 지나가지 않은 곳은 음성이 아니라 모름입니다. 이것이 PU 문제입니다. SyNeT은 음성을 합성하고, GSAT은 양성 둘레 초구 밖을 이상으로 보고, Long-Horizon Traversability는 nnPU 손실로 보정합니다. travplan의 TravNet은 연속 회귀 목표와 가우시안 NLL을 쓰고 라벨 없는 칸을 손실에서 빼므로, 지금 단계에서는 이 문제가 생기지 않습니다. GSAT은 입력이 기하라 TravNet과 가장 가깝고, 초구 거리는 OOD 점수 후보로 남깁니다.</a:t>
+              <a:t>자기지도 traversability는 지나간 자리만 양성이고, 지나가지 않은 곳은 음성이 아니라 모름입니다. 이것이 PU 문제입니다. SyNeT은 음성을 합성하고, GSAT은 양성 둘레 hypersphere 밖을 이상으로 보고, Long-Horizon Traversability는 nnPU 손실로 보정합니다. travplan의 TravNet은 연속 회귀 목표와 가우시안 NLL을 쓰고 라벨 없는 칸을 손실에서 빼므로, 지금 단계에서는 이 문제가 생기지 않습니다. GSAT은 입력이 기하라 TravNet과 가장 가깝고, hypersphere 거리는 OOD 점수 후보로 남깁니다.</a:t>
             </a:r>
           </a:p>
         </p:txBody>
@@ -891,7 +891,7 @@
           <a:lstStyle/>
           <a:p>
             <a:r>
-              <a:t>2026년의 다른 흐름은 비전 기반 모델과 VLM입니다. PIVOT은 VLM 비용을 실제 에너지, 진동, 슬립과의 상관으로 가중하고, 기하 계획이 경로를 못 찾을 때만 VLM을 부릅니다. 약 6.4 km 경로 5회 반복에서 얻은 수치입니다. 이 두 층 구조가 travplan에 그대로 맞습니다. CATNAV의 캐시는 Orin 예산에서 VLM 호출 빈도를 낮추는 방법입니다. 다만 VLM을 매 주기 비용으로 쓰는 것은 계획 시간 기준에 걸립니다.</a:t>
+              <a:t>2026년의 다른 흐름은 비전 파운데이션 모델과 VLM입니다. PIVOT은 VLM 비용을 실제 에너지, 진동, 슬립과의 상관으로 가중하고, 기하 계획이 경로를 못 찾을 때만 VLM을 부릅니다. 약 6.4 km 경로 5회 반복에서 얻은 수치입니다. 이 두 층 구조가 travplan에 그대로 맞습니다. CATNAV의 캐시는 Orin 예산에서 VLM 호출 빈도를 낮추는 방법입니다. 다만 VLM을 매 주기 비용으로 쓰는 것은 계획 시간 기준에 걸립니다.</a:t>
             </a:r>
           </a:p>
         </p:txBody>
@@ -961,7 +961,7 @@
           <a:lstStyle/>
           <a:p>
             <a:r>
-              <a:t>세 번째 묶음은 영상 쪽입니다. 시각 기반 모델을 로봇에서 어떻게 쓰는지 보고, 보행자 대응의 세 단계인 검출, 추적, 예측을 봅니다. 마지막으로 예측을 잘해도 양보가 풀리지 않는다는 Freezing Robot Problem과, 예측 오차 폭을 보정하는 최근 연구를 봅니다.</a:t>
+              <a:t>세 번째 절은 영상 쪽입니다. 비전 파운데이션 모델을 로봇에서 어떻게 쓰는지 살펴보고, 보행자 대응의 세 단계인 검출, 추적, 예측을 다룹니다. 마지막으로 예측을 잘해도 양보가 풀리지 않는다는 Freezing Robot Problem과, 예측 오차 폭을 보정하는 최근 연구를 살펴봅니다.</a:t>
             </a:r>
           </a:p>
         </p:txBody>
@@ -1031,7 +1031,7 @@
           <a:lstStyle/>
           <a:p>
             <a:r>
-              <a:t>2023년부터 로봇 인식의 출발점은 과제별 모델이 아니라 시각 기반 모델입니다. 그런데 Orin에서 큰 백본을 매 프레임 돌린 근거는 아직 얇습니다. 그래서 travplan은 Grounding DINO와 SAM으로 보행자, 킥보드, 볼라드 마스크를 만들고, Depth Anything으로 깊이 가짜 라벨을 만든 뒤 작은 모델로 증류하는 교사 용도로 먼저 씁니다. 제품 경로에는 Apache-2.0 가중치만 두고, DINOv3와 SAM 3는 라이선스 조건을 확인한 뒤 연구 비교에만 씁니다.</a:t>
+              <a:t>2023년부터 로봇 인식의 출발점은 과제별 모델이 아니라 비전 파운데이션 모델입니다. 그런데 Orin에서 큰 백본을 매 프레임 돌린 근거는 아직 얇습니다. 그래서 travplan은 Grounding DINO와 SAM으로 보행자, 킥보드, 볼라드 마스크를 만들고, Depth Anything으로 깊이 pseudo-label을 만든 뒤 작은 모델로 증류하는 교사 용도로 먼저 씁니다. 제품 경로에는 Apache-2.0 가중치만 두고, DINOv3와 SAM 3는 라이선스 조건을 확인한 뒤 연구 비교에만 씁니다.</a:t>
             </a:r>
           </a:p>
         </p:txBody>
@@ -1101,7 +1101,7 @@
           <a:lstStyle/>
           <a:p>
             <a:r>
-              <a:t>실시간 검출의 주류는 오래 YOLO였지만 Ultralytics YOLO는 AGPL-3.0이라 제품 경로에서는 Apache-2.0 실시간 DETR로 바꿉니다. PoC의 추론 API만 바꾸면 됩니다. 영상 평면 추적은 로봇이 돌면 매칭이 깨지므로, odom 좌표의 등속 칼만 필터로 옮깁니다. 예측은 등속 모델을 기준선으로 유지합니다. Schöller 등이 보였듯 싸고 강하고, DynamicObstacles는 이미 불확실성이 시간에 따라 커지는 원판으로 그 한계를 덮습니다.</a:t>
+              <a:t>실시간 검출의 주류는 오래 YOLO였지만 Ultralytics YOLO는 AGPL-3.0이라 제품 경로에서는 Apache-2.0 실시간 DETR로 바꿉니다. PoC의 추론 API만 바꾸면 됩니다. 영상 평면 추적은 로봇이 돌면 매칭이 깨지므로, odom 좌표의 등속 칼만 필터로 옮깁니다. 예측은 등속 모델을 기준선으로 유지합니다. Schöller 등이 보여 줬듯 싸고 강하며, DynamicObstacles는 이미 불확실성이 시간에 따라 커지는 원판으로 그 한계를 덮습니다.</a:t>
             </a:r>
           </a:p>
         </p:txBody>
@@ -1311,7 +1311,7 @@
           <a:lstStyle/>
           <a:p>
             <a:r>
-              <a:t>앞의 세 묶음은 남이 무엇을 했는지이고, 뒤의 둘은 우리가 무엇을 고르고 쟀는지입니다. 최근 연구 비교는 그 사이의 다리입니다. 문헌이 모인 방향과 travplan이 이미 서 있는 자리를 맞대 보고, 무엇을 먼저 시도할지 정합니다. 센서 배치는 짧게 덧붙입니다.</a:t>
+              <a:t>앞의 세 절은 남이 무엇을 했는지이고, 뒤의 두 절은 우리가 무엇을 고르고 쟀는지입니다. 최근 연구 비교는 그 사이의 다리입니다. 문헌이 모인 방향과 travplan이 이미 서 있는 자리를 맞대 보고, 무엇을 먼저 시도할지 정합니다. 센서 배치는 짧게 덧붙입니다.</a:t>
             </a:r>
           </a:p>
         </p:txBody>
@@ -1381,7 +1381,7 @@
           <a:lstStyle/>
           <a:p>
             <a:r>
-              <a:t>보행 로봇 탭과 예측 탭은 다른 분야에서 가져올 설계 참고입니다. 자동차 world model은 모두 데스크톱 GPU급이고 Orin 실측이 없어 앞으로 볼 계보로 둡니다. 다만 RiskWorld의 위험할 때만 재계획은 Planner D 재계획에 참고합니다. travplan이 쓰는 GPU elevation mapping은 자동차보다 4족 보행 계보가 가장 강하게 뒷받침합니다. 같은 스택이 4족과 휴머노이드 양쪽에서 재사용되고 있습니다. 바퀴형 공개 기준으로는 CMU 자율 스택의 지형 분석을 둡니다.</a:t>
+              <a:t>보행 로봇 탭과 예측 탭은 다른 분야에서 가져올 설계 참고입니다. 자동차 world model은 모두 데스크톱 GPU급이고 Orin 실측이 없어 앞으로 지켜볼 계보로 둡니다. 다만 RiskWorld의 위험할 때만 재계획은 Planner D 재계획에 참고합니다. travplan이 쓰는 GPU elevation mapping은 자동차보다 4족 보행 계보가 가장 강하게 뒷받침합니다. 같은 스택이 4족과 휴머노이드 양쪽에서 재사용되고 있습니다. 바퀴형 공개 기준으로는 CMU 자율 스택의 지형 분석을 둡니다.</a:t>
             </a:r>
           </a:p>
         </p:txBody>
@@ -1451,7 +1451,7 @@
           <a:lstStyle/>
           <a:p>
             <a:r>
-              <a:t>네 번째 묶음은 최근 연구 비교입니다. 2025년과 2026년 연구는 로봇이 지나간 자리와 본 자리만 안다는 사실을 정면으로 다루는 쪽으로 모였습니다. 자기지도 traversability는 PU 문제로, 지형 지도는 공간 상관이나 가림 분산으로, 보행자 예측은 오차 폭의 보정으로 갑니다. 비교표, 공통점, 차이점, 그리고 travplan이 무엇을 먼저 할지 순서로 봅니다.</a:t>
+              <a:t>네 번째 절은 최근 연구 비교입니다. 2025년과 2026년 연구는 로봇이 지나간 자리와 본 자리만 안다는 사실을 정면으로 다루는 쪽으로 모였습니다. 자기지도 traversability는 PU 문제로, 지형 지도는 공간 상관이나 가림 분산으로, 보행자 예측은 오차 폭의 보정으로 갑니다. 비교표, 공통점, 차이점, 그리고 travplan이 무엇을 먼저 할지 순서로 살펴봅니다.</a:t>
             </a:r>
           </a:p>
         </p:txBody>
@@ -1521,7 +1521,7 @@
           <a:lstStyle/>
           <a:p>
             <a:r>
-              <a:t>A.14 비교표의 앞쪽 여덟 편입니다. 모두 2026년 arXiv이고 GSAT만 ICRA 2026입니다. 입력은 영상 쪽과 기하 쪽으로 나뉘고, 학습 신호는 대부분 로봇이 지나간 자리나 접지 후 측정입니다. 불확실성을 내는 것은 GSAT의 초구 거리, Experience-Driven CL의 evidential 분산, Task-Conditioned Costmaps의 앙상블 분산 정도입니다. Orin에서 잰 것은 SyNeT 하나뿐입니다.</a:t>
+              <a:t>A.14 비교표의 앞쪽 여덟 편입니다. 모두 2026년 arXiv이고 GSAT만 ICRA 2026입니다. 입력은 영상 쪽과 기하 쪽으로 나뉘고, 학습 신호는 대부분 로봇이 지나간 자리나 접지 후 측정입니다. 불확실성을 내는 것은 GSAT의 hypersphere 거리, Experience-Driven CL의 evidential 분산, Task-Conditioned Costmaps의 앙상블 분산 정도입니다. Orin에서 잰 것은 SyNeT 하나뿐입니다.</a:t>
             </a:r>
           </a:p>
         </p:txBody>
@@ -1591,7 +1591,7 @@
           <a:lstStyle/>
           <a:p>
             <a:r>
-              <a:t>뒤쪽 일곱 편입니다. 지형 쪽 셋은 앞의 지형 지도 묶음에서 본 것이고, WalkOCC는 보도 배달로봇을 겨냥한 단안 occupancy라 문제 설정이 가장 가깝지만 코드는 약속 뒤 공개되지 않았습니다. 보행자 쪽 셋은 모두 정확도가 아니라 오차 폭의 보정을 다룹니다. 코드가 공개된 것은 Calibrated Gaussian Predictors 하나입니다.</a:t>
+              <a:t>뒤쪽 일곱 편입니다. 지형 쪽 셋은 앞의 지형 지도 절에서 본 것이고, WalkOCC는 보도 배달로봇을 겨냥한 단안 occupancy라 문제 설정이 가장 가깝지만 코드는 공개를 약속했지만 아직 나오지 않았습니다. 보행자 쪽 셋은 모두 정확도가 아니라 오차 폭의 보정을 다룹니다. 코드가 공개된 것은 Calibrated Gaussian Predictors 하나입니다.</a:t>
             </a:r>
           </a:p>
         </p:txBody>
@@ -1661,7 +1661,7 @@
           <a:lstStyle/>
           <a:p>
             <a:r>
-              <a:t>공통점은 네 가지입니다. 첫째, 사람 라벨 대신 지나간 자리를 양성으로 씁니다. 둘째, 라벨 없는 칸을 음성으로 두지 않습니다. GSAT은 그렇게 하면 F1이 오히려 떨어진다고 보였습니다. 셋째, 큰 시각 모델은 고정하고 작은 헤드만 학습합니다. 넷째, 불확실성을 계획이 바로 쓰는 형태로 냅니다. travplan은 첫째, 둘째, 넷째에 이미 서 있고, 셋째는 영상 TravNet을 들일 때의 일입니다.</a:t>
+              <a:t>공통점은 네 가지입니다. 첫째, 사람 라벨 대신 지나간 자리를 양성으로 씁니다. 둘째, 라벨 없는 칸을 음성으로 두지 않습니다. GSAT은 그렇게 하면 F1이 오히려 떨어진다는 것을 보여 줬습니다. 셋째, 큰 시각 모델은 고정하고 작은 헤드만 학습합니다. 넷째, 불확실성을 계획이 바로 쓰는 형태로 냅니다. travplan은 첫째, 둘째, 넷째에 이미 서 있고, 셋째는 영상 TravNet을 도입할 때의 일입니다.</a:t>
             </a:r>
           </a:p>
         </p:txBody>
@@ -1731,7 +1731,7 @@
           <a:lstStyle/>
           <a:p>
             <a:r>
-              <a:t>차이점은 여섯 축으로 정리됩니다. 가장 중요한 것은 불확실성이 무엇을 재는가입니다. 지형 관측 부족, 모델의 epistemic, 예측 오차의 포함률의 세 갈래이고, travplan의 SIGMA는 첫째에 속합니다. 지금은 못 본 칸을 1로 두는 이진 규약이거나, TP-0054에서 만든 cost의 높이 민감도 규약입니다. 입력은 영상과 기하로 갈리는데, 포트홀과 턱이 주된 위험인 보도에서는 기하 쪽이 먼저입니다. 실시간성에서 Occlusion-Aware Planning은 계획마다 Levenberg–Marquardt 맞춤이 있어 그대로는 쓸 수 없습니다.</a:t>
+              <a:t>차이점은 여섯 축으로 정리됩니다. 가장 중요한 것은 불확실성이 무엇을 재는가입니다. 지형 관측 부족, 모델의 epistemic 불확실성, 예측 구간의 coverage 세 갈래이고, travplan의 SIGMA는 첫째에 속합니다. 지금은 못 본 칸을 1로 두는 이진 규약이거나, TP-0054에서 만든 cost의 높이 민감도 규약입니다. 입력은 영상과 기하로 갈리는데, 포트홀과 턱이 주된 위험인 보도에서는 기하 쪽이 먼저입니다. 실시간성에서 Occlusion-Aware Planning은 계획마다 Levenberg–Marquardt 피팅이 있어 그대로는 쓸 수 없습니다.</a:t>
             </a:r>
           </a:p>
         </p:txBody>
@@ -1871,7 +1871,7 @@
           <a:lstStyle/>
           <a:p>
             <a:r>
-              <a:t>다섯 번째 묶음은 우리가 고치고 잰 것입니다. 리서치 절이 남이 무엇을 했는지라면, 작업 기록은 TP 번호와 커밋이 붙은 측정입니다. 문헌의 규칙을 직접 재 본 결과, 차체 기준으로 belief를 채점한 결과, 그리고 L1 레벨 3 치명의 원인을 찾아 권장 L1 설정에 이른 과정을 봅니다.</a:t>
+              <a:t>다섯 번째 절은 우리가 고치고 잰 것입니다. 리서치 절이 남이 무엇을 했는지라면, 작업 기록은 TP 번호와 커밋이 붙은 측정입니다. 문헌의 규칙을 직접 재 본 결과, 차체 기준으로 belief를 채점한 결과, 그리고 L1 레벨 3 치명의 원인을 찾아 권장 L1 설정에 이른 과정을 살펴봅니다.</a:t>
             </a:r>
           </a:p>
         </p:txBody>
@@ -1941,7 +1941,7 @@
           <a:lstStyle/>
           <a:p>
             <a:r>
-              <a:t>emap 원 논문은 상한의 기울기로 가려진 평지와 진짜 낙차를 가른다고 씁니다. 그래서 그 규칙을 travplan의 근거 규칙과 같은 하네스에서 맞대 봤습니다. 같은 재현율 0.89에서 기울기 규칙은 전방 오탐이 47칸으로, 근거 규칙의 2.8칸보다 훨씬 많았습니다. 문턱을 올려 오탐을 없애면 재현율이 prior를 쓰지 않은 값으로 돌아갑니다. 2.5D 상한 래스터에서 기울기 검정은 근거 규칙으로 퇴화하거나 아무것도 못 잡는다는 것이 결론입니다.</a:t>
+              <a:t>emap 원 논문은 상한의 기울기로 가려진 평지와 진짜 낙차를 가른다고 씁니다. 그래서 그 규칙을 travplan의 근거 규칙과 같은 하네스에서 맞대 봤습니다. 같은 재현율 0.89에서 기울기 규칙은 전방 오탐이 47칸으로, 근거 규칙의 2.8칸보다 훨씬 많았습니다. 임계값을 올려 오탐을 없애면 재현율이 prior를 쓰지 않은 값으로 돌아갑니다. 2.5D 상한 래스터에서 기울기 검정은 근거 규칙으로 퇴화하거나 아무것도 못 잡는다는 것이 결론입니다.</a:t>
             </a:r>
           </a:p>
         </p:txBody>
@@ -2011,7 +2011,7 @@
           <a:lstStyle/>
           <a:p>
             <a:r>
-              <a:t>TP-0100은 belief를 차체 기하 기준으로 채점했습니다. 차체가 어느 방위로도 들어갈 수 없는 칸을 belief가 주행 가능이라 부르면 MISS입니다. 결과는 분명했습니다. MISS의 99% 이상이 못 본 칸이고, 관측한 칸은 거의 틀리지 않습니다. 깊이 prior의 폐루프 개선 36에서 40은 MISS를 막아서가 아니라 Planner가 포트홀에서 먼 경로를 고르게 한 효과였습니다. L1은 L0 가림보다 2.8배 나쁜데, 문제는 정확도가 아니라 덮는 범위입니다.</a:t>
+              <a:t>TP-0100은 belief를 차체 기하 기준으로 채점했습니다. 차체가 어느 방위로도 들어갈 수 없는 칸을 belief가 주행 가능이라 부르면 MISS입니다. 결과는 분명했습니다. MISS의 99% 이상이 못 본 칸이고, 관측한 칸은 거의 틀리지 않습니다. 깊이 prior의 폐루프 개선 36에서 40은 MISS를 막아서가 아니라 Planner가 포트홀에서 먼 경로를 고르게 한 효과였습니다. L1은 L0 가림보다 2.8배 나쁜데, 문제는 정확도가 아니라 관측 범위(coverage)입니다.</a:t>
             </a:r>
           </a:p>
         </p:txBody>
@@ -2151,7 +2151,7 @@
           <a:lstStyle/>
           <a:p>
             <a:r>
-              <a:t>TP-0100의 처방을 바로 시험한 것이 TP-0101입니다. 로봇 둘레 1.5 m 안의 못 본 칸을 치명으로 두면 L0에서는 MISS가 0이 되고 비용이 거의 없습니다. L1에서는 MISS가 사라지지만 음의 지형 오탐이 13배 늘고 도달이 느려집니다. TP-0065에서 전면 스테레오를 두 번째 점군으로 넣으니 그 대가가 사라졌습니다. 흥미로운 점은 스테레오만으로는 MISS가 5%밖에 줄지 않는다는 것입니다. 스테레오의 값은 옵션이 막던 앞쪽을 풀어 주는 데 있습니다. 폐루프 표는 seed 3개 한 번 실행입니다.</a:t>
+              <a:t>TP-0100의 처방을 바로 시험한 것이 TP-0101입니다. 로봇 둘레 1.5 m 안의 못 본 칸을 치명으로 두면 L0에서는 MISS가 0이 되고 비용이 거의 없습니다. L1에서는 MISS가 사라지지만 음의 지형 오탐이 13배 늘고 도달이 느려집니다. TP-0065에서 전면 스테레오를 두 번째 점군으로 넣으니 그 대가가 사라졌습니다. 흥미로운 점은 스테레오만으로는 MISS가 5%밖에 줄지 않는다는 것입니다. 스테레오의 가치는 미관측 치명 옵션이 막던 앞쪽을 풀어 주는 데 있습니다. 폐루프 표는 seed 3개를 한 번 실행한 값입니다.</a:t>
             </a:r>
           </a:p>
         </p:txBody>
@@ -2291,7 +2291,7 @@
           <a:lstStyle/>
           <a:p>
             <a:r>
-              <a:t>2026-10-03의 다음 병목 측정에서 L1 레벨 3은 세 스택 모두 4분의 1이 치명이었습니다. 진단 스크립트로 80건을 모두 재현해 보니, 78건은 belief가 포트홀과 연석의 치명 띠를 안쪽에 그려서 났습니다. 원인 하나는 래퍼 버그였습니다. 매퍼 칸 수가 짝수라 시뮬 격자와 반 칸 어긋나 있었습니다. 다른 하나는 테두리 바로 뒤를 스치는 칸이 얕게 채워진 것입니다. 남은 치명은 포트홀 가장자리의 mixed pixel이었고, 구덩이에만 한 칸 여유를 두어 6건으로 줄였습니다. 배포 스택 planner_df는 가장 위험하던 스택에서 가장 나은 스택이 됐습니다.</a:t>
+              <a:t>2026-10-03의 다음 병목 측정에서 L1 레벨 3은 세 스택 모두 4분의 1이 치명이었습니다. 진단 스크립트로 80건을 모두 재현해 보니, 78건은 belief가 포트홀과 연석의 치명 영역을 안쪽에 그려서 났습니다. 원인 하나는 래퍼 버그였습니다. 매퍼 칸 수가 짝수라 시뮬 격자와 반 칸 어긋나 있었습니다. 다른 하나는 테두리 바로 뒤를 스치는 칸이 얕게 채워진 것입니다. 남은 치명은 포트홀 가장자리의 mixed pixel이었고, 구덩이에만 한 칸 여유를 두어 6건으로 줄였습니다. 배포 스택 planner_df는 가장 위험하던 스택에서 가장 나은 스택이 됐습니다.</a:t>
             </a:r>
           </a:p>
         </p:txBody>
@@ -2361,7 +2361,7 @@
           <a:lstStyle/>
           <a:p>
             <a:r>
-              <a:t>여기까지의 결과를 모은 것이 권장 L1 설정입니다. 뒤의 두 플래그는 builder 기본값이 끔인 선택 항목이고, L0 벤치마크와 Playground는 쓰지 않습니다. 권장 L1의 레벨 0은 세 스택 모두 40/40이고, 레벨 3은 seed 10개와 난수 오프셋 3으로 잰 값입니다. 매퍼의 순서 의존 넷을 닫아 L1은 비트 단위로 재현되고(TP-0098), GPU 경로도 CPU와 같은 결과를 냅니다. 그래서 이 수치를 그대로 짝 비교의 기준선으로 씁니다.</a:t>
+              <a:t>여기까지의 결과를 모은 것이 권장 L1 설정입니다. 뒤의 두 플래그는 builder 기본값이 끔인 선택 항목이고, L0 벤치마크와 Playground는 쓰지 않습니다. 권장 L1의 레벨 0은 세 스택 모두 40/40이고, 레벨 3은 seed 10개와 난수 오프셋 3으로 잰 값입니다. 매퍼의 순서 의존성 네 곳을 없애 L1은 비트 단위로 재현되고(TP-0098), GPU 경로도 CPU와 같은 결과를 냅니다. 그래서 이 수치를 그대로 짝 비교의 기준선으로 씁니다.</a:t>
             </a:r>
           </a:p>
         </p:txBody>
@@ -2431,7 +2431,7 @@
           <a:lstStyle/>
           <a:p>
             <a:r>
-              <a:t>권장 L1에 스워브 plant를 얹으면 레벨 3이 다시 무너졌습니다. 완전한 인식에서도 같은 일이 생기므로 인식이 아니라 Controller가 plant의 지연을 모르는 것이 원인이었습니다. rollout에 지연을 넣어 치명을 4건으로 줄였습니다. 보행자 5명을 얹으면 충돌이 720 중 8건이고, 진단해 보니 MPPI의 보행자 hard 벌점이 포화해 피할 방향이 사라졌습니다. 남은 정면 충돌 4건은 조향 한계 때문입니다. 등급화 벌점은 충돌을 8에서 4로 줄였고, 배포 Controller로 바꿀지는 사용자 결정으로 남아 있습니다.</a:t>
+              <a:t>권장 L1에 스워브 plant를 얹으면 레벨 3이 다시 무너졌습니다. 완전한 인식에서도 같은 일이 생기므로 인식이 아니라 Controller가 plant의 지연을 모르는 것이 원인이었습니다. rollout에 지연을 넣어 치명을 4건으로 줄였습니다. 보행자 5명을 얹으면 충돌이 720 중 8건이고, 진단해 보니 MPPI의 보행자 hard 페널티가 포화해 피할 방향이 사라졌습니다. 남은 정면 충돌 4건은 조향 한계 때문입니다. 등급화 페널티는 충돌을 8에서 4로 줄였고, 배포 Controller로 바꿀지는 사용자 결정으로 남아 있습니다.</a:t>
             </a:r>
           </a:p>
         </p:txBody>
@@ -2711,7 +2711,7 @@
           <a:lstStyle/>
           <a:p>
             <a:r>
-              <a:t>정리하면, travplan은 표현을 바꾸지 않습니다. 문헌이 모인 방향인 지나간 자리만 양성, 라벨 없는 칸은 모름, 불확실성을 계획까지라는 원칙에 이미 상당 부분 서 있습니다. 작업 기록은 위험이 못 본 칸에 있고, L1 치명의 원인이 지도 가장자리였다는 것을 보였습니다. 다음은 새 모델을 들이기보다 이미 내는 시그마가 맞는지 재는 일입니다. 질문 받겠습니다.</a:t>
+              <a:t>정리하면, travplan은 표현을 바꾸지 않습니다. 문헌이 모인 방향인 지나간 자리만 양성, 라벨 없는 칸은 모름, 불확실성을 계획까지라는 원칙에 이미 상당 부분 서 있습니다. 작업 기록은 위험이 못 본 칸에 있고, L1 치명의 원인이 지도 가장자리였다는 것을 보여 줬습니다. 다음은 새 모델을 도입하기보다 이미 내는 시그마가 맞는지 재는 일입니다. 질문 받겠습니다.</a:t>
             </a:r>
           </a:p>
         </p:txBody>
@@ -2851,7 +2851,7 @@
           <a:lstStyle/>
           <a:p>
             <a:r>
-              <a:t>이 표는 인식 문서 첫머리의 계보표를 줄인 것입니다. 지형 지도, traversability, 시각 기반 모델, 동적 장애물 네 줄기가 거의 같은 시기에 사람 라벨을 줄이고 큰 사전학습 모델을 쓰는 쪽으로 움직였습니다. travplan은 지형을 elevation mapping 높이 지도로, 비용을 기하 규칙에서 시작해 TravNet 자기지도로, 보행자를 카메라 검출과 추적으로 다룹니다. 시각 기반 모델은 라벨 교사로, 자동차 occupancy와 world model은 표현 설계 참고로 둡니다.</a:t>
+              <a:t>이 표는 인식 문서 첫머리의 계보표를 줄인 것입니다. 지형 지도, traversability, 비전 파운데이션 모델, 동적 장애물 네 줄기가 거의 같은 시기에 사람 라벨을 줄이고 큰 사전학습 모델을 쓰는 쪽으로 움직였습니다. travplan은 지형을 elevation mapping 높이 지도로, 비용을 기하 규칙에서 시작해 TravNet 자기지도로, 보행자를 카메라 검출과 추적으로 다룹니다. 비전 파운데이션 모델은 라벨 교사로, 자동차 occupancy와 world model은 표현 설계 참고로 둡니다.</a:t>
             </a:r>
           </a:p>
         </p:txBody>
@@ -2991,7 +2991,7 @@
           <a:lstStyle/>
           <a:p>
             <a:r>
-              <a:t>첫 묶음은 지형 지도입니다. 자동차 쪽의 BEV와 3D occupancy 계보를 먼저 짧게 보고, 왜 채택하지 않는지 말씀드립니다. 그다음 travplan이 실제로 쓰는 elevation mapping 계보와, 보도에서 가장 위험한 음의 장애물, 그리고 못 본 칸의 처리 방식을 봅니다.</a:t>
+              <a:t>첫 절은 지형 지도입니다. 자동차 쪽의 BEV와 3D occupancy 계보를 먼저 짧게 보고, 왜 채택하지 않는지 말씀드립니다. 그다음 travplan이 실제로 쓰는 elevation mapping 계보와, 보도에서 가장 위험한 음의 장애물, 그리고 못 본 칸의 처리 방식을 살펴봅니다.</a:t>
             </a:r>
           </a:p>
         </p:txBody>
@@ -3131,7 +3131,7 @@
           <a:lstStyle/>
           <a:p>
             <a:r>
-              <a:t>travplan이 채택한 계보는 ETH의 elevation mapping입니다. 점 하나의 분산은 센서 거리의 제곱에 비례하고, 칸 높이는 그 분산으로 가중 평균합니다. GPU 판인 elevation_mapping_cupy는 가시성 정리와 상한 층을 더했습니다. 광선이 관측되지 않은 칸 위를 지나가면, 그 칸의 지면은 광선보다 높을 수 없다는 것입니다. travplan 셀 수는 220×220이라, Orin Nano 30 Hz 보고와 거의 같은 규모입니다. 그래서 매핑 자체는 병목이 아니라는 외부 근거로 봅니다.</a:t>
+              <a:t>travplan이 채택한 계보는 ETH의 elevation mapping입니다. 점 하나의 분산은 센서 거리의 제곱에 비례하고, 칸 높이는 그 분산으로 가중 평균합니다. GPU 판인 elevation_mapping_cupy는 가시성 정리와 상한 층을 더했습니다. 광선이 관측되지 않은 칸 위를 지나가면, 그 칸의 지면은 광선보다 높을 수 없다는 것입니다. travplan 셀 수는 220×220이라, Orin Nano 30 Hz 보고와 거의 같은 규모입니다. 그래서 매핑 자체는 병목이 아니라는 외부 근거로 삼습니다.</a:t>
             </a:r>
           </a:p>
         </p:txBody>
@@ -7486,7 +7486,7 @@
                 <a:ea typeface="Malgun Gothic"/>
                 <a:cs typeface="Malgun Gothic"/>
               </a:rPr>
-              <a:t>공분산을 합성곱 두 번으로 만든다.</a:t>
+              <a:t>공분산을 convolution 두 번으로 만든다.</a:t>
             </a:r>
           </a:p>
         </p:txBody>
@@ -7811,7 +7811,7 @@
                 <a:ea typeface="Malgun Gothic"/>
                 <a:cs typeface="Malgun Gothic"/>
               </a:rPr>
-              <a:t>확산 모델로 채움</a:t>
+              <a:t>diffusion 모델로 채움</a:t>
             </a:r>
           </a:p>
         </p:txBody>
@@ -8111,7 +8111,7 @@
                 <a:ea typeface="Malgun Gothic"/>
                 <a:cs typeface="Malgun Gothic"/>
               </a:rPr>
-              <a:t>Fig. 2: 상관 모델 대 칸 독립 궤적 표본 [9]</a:t>
+              <a:t>Fig. 2: 상관 모델 대 칸 독립 궤적 샘플 [9]</a:t>
             </a:r>
           </a:p>
         </p:txBody>
@@ -8556,7 +8556,7 @@
                 <a:ea typeface="Malgun Gothic"/>
                 <a:cs typeface="Malgun Gothic"/>
               </a:rPr>
-              <a:t>사람 라벨 분할에서 로봇 경험 기반 자기지도로, 다시 비전 기반 모델과 VLM으로</a:t>
+              <a:t>사람 라벨 분할에서 로봇 경험 기반 자기지도로, 다시 비전 파운데이션 모델과 VLM으로</a:t>
             </a:r>
           </a:p>
         </p:txBody>
@@ -9199,7 +9199,7 @@
                           <a:ea typeface="Malgun Gothic"/>
                           <a:cs typeface="Malgun Gothic"/>
                         </a:rPr>
-                        <a:t>비전 기반 모델·VLM</a:t>
+                        <a:t>VFM·VLM</a:t>
                       </a:r>
                     </a:p>
                   </a:txBody>
@@ -9381,7 +9381,7 @@
                 <a:ea typeface="Malgun Gothic"/>
                 <a:cs typeface="Malgun Gothic"/>
               </a:rPr>
-              <a:t>BADGR (Fig. 5): 영상과 행동 열로 미래 사건을 예측한다 — 출처 [12]</a:t>
+              <a:t>BADGR (Fig. 5): 영상과 행동 시퀀스로 미래 사건을 예측한다 — 출처 [12]</a:t>
             </a:r>
           </a:p>
         </p:txBody>
@@ -9612,7 +9612,7 @@
                 <a:ea typeface="Malgun Gothic"/>
                 <a:cs typeface="Malgun Gothic"/>
               </a:rPr>
-              <a:t>사건 라벨은 TravNet 자기지도(TP-0010)와, 행동 열 표본의 가중 평균은 MPPI와 같다.</a:t>
+              <a:t>사건 라벨은 TravNet 자기지도(TP-0010)와, 행동 시퀀스 샘플의 가중 평균은 MPPI와 같다.</a:t>
             </a:r>
           </a:p>
         </p:txBody>
@@ -10582,7 +10582,7 @@
                 <a:ea typeface="Malgun Gothic"/>
                 <a:cs typeface="Malgun Gothic"/>
               </a:rPr>
-              <a:t>확산 inpainting으로 지나갈 수 없는 물체를 영상에 넣는다.</a:t>
+              <a:t>diffusion inpainting으로 지나갈 수 없는 물체를 영상에 넣는다.</a:t>
             </a:r>
           </a:p>
         </p:txBody>
@@ -10808,7 +10808,7 @@
         <p:spPr>
           <a:xfrm>
             <a:off x="4567734" y="1507728"/>
-            <a:ext cx="917476" cy="241300"/>
+            <a:ext cx="1433413" cy="241300"/>
           </a:xfrm>
           <a:prstGeom prst="roundRect">
             <a:avLst>
@@ -10839,7 +10839,7 @@
         <p:spPr>
           <a:xfrm>
             <a:off x="4656634" y="1533128"/>
-            <a:ext cx="787266" cy="288925"/>
+            <a:ext cx="1318682" cy="288925"/>
           </a:xfrm>
           <a:prstGeom prst="rect">
             <a:avLst/>
@@ -10866,7 +10866,7 @@
                 <a:ea typeface="Malgun Gothic"/>
                 <a:cs typeface="Malgun Gothic"/>
               </a:rPr>
-              <a:t>초구 이상 탐지</a:t>
+              <a:t>hypersphere 이상 탐지</a:t>
             </a:r>
           </a:p>
         </p:txBody>
@@ -10948,7 +10948,7 @@
                 <a:ea typeface="Malgun Gothic"/>
                 <a:cs typeface="Malgun Gothic"/>
               </a:rPr>
-              <a:t>양성 잠재 둘레 초구 밖을 이상으로 본다. LiDAR 기하만 쓴다.</a:t>
+              <a:t>양성 latent 둘레의 hypersphere 밖을 이상으로 본다. LiDAR 기하만 쓴다.</a:t>
             </a:r>
           </a:p>
         </p:txBody>
@@ -11562,7 +11562,7 @@
                 <a:ea typeface="Malgun Gothic"/>
                 <a:cs typeface="Malgun Gothic"/>
               </a:rPr>
-              <a:t>GSAT (Fig. 1): 궤적 양성과 잠재 초구로 정상·이상을 나눈다 — 출처 [14]</a:t>
+              <a:t>GSAT (Fig. 1): 궤적 양성과 latent hypersphere로 정상·이상을 나눈다 — 출처 [14]</a:t>
             </a:r>
           </a:p>
         </p:txBody>
@@ -11645,7 +11645,7 @@
                 <a:ea typeface="Malgun Gothic"/>
                 <a:cs typeface="Malgun Gothic"/>
               </a:rPr>
-              <a:t> TravNet은 라벨 없는 칸을 손실에서 빼서 이 문제를 이미 피한다. 세 방법은 실물·영상 단계(TP-0059)에서 다시 본다.</a:t>
+              <a:t> TravNet은 라벨 없는 칸을 손실에서 빼서 이 문제를 이미 피한다. 세 방법은 실물·영상 단계(TP-0059)에서 다시 다룬다.</a:t>
             </a:r>
           </a:p>
         </p:txBody>
@@ -11809,7 +11809,7 @@
                 <a:ea typeface="Malgun Gothic"/>
                 <a:cs typeface="Malgun Gothic"/>
               </a:rPr>
-              <a:t>A.10.2 · 비전 기반 모델과 VLM</a:t>
+              <a:t>A.10.2 · 비전 파운데이션 모델과 VLM</a:t>
             </a:r>
           </a:p>
         </p:txBody>
@@ -13047,7 +13047,7 @@
                 <a:ea typeface="Malgun Gothic"/>
                 <a:cs typeface="Malgun Gothic"/>
               </a:rPr>
-              <a:t>3 · 시각 기반 모델 · 동적 장애물 (A.11–A.12)</a:t>
+              <a:t>3 · 비전 파운데이션 모델 · 동적 장애물 (A.11–A.12)</a:t>
             </a:r>
           </a:p>
         </p:txBody>
@@ -13214,7 +13214,7 @@
                 <a:ea typeface="Malgun Gothic"/>
                 <a:cs typeface="Malgun Gothic"/>
               </a:rPr>
-              <a:t>A.11 · 시각 기반 모델</a:t>
+              <a:t>A.11 · 비전 파운데이션 모델</a:t>
             </a:r>
           </a:p>
         </p:txBody>
@@ -13255,7 +13255,7 @@
                 <a:ea typeface="Malgun Gothic"/>
                 <a:cs typeface="Malgun Gothic"/>
               </a:rPr>
-              <a:t>시각 기반 모델은 로봇에서 돌리기 전에 라벨 교사로 먼저 쓴다</a:t>
+              <a:t>비전 파운데이션 모델은 로봇에서 돌리기 전에 라벨 교사로 먼저 쓴다</a:t>
             </a:r>
           </a:p>
         </p:txBody>
@@ -13279,9 +13279,9 @@
                 <a:tableStyleId>{5C22544A-7EE6-4342-B048-85BDC9FD1C3A}</a:tableStyleId>
               </a:tblPr>
               <a:tblGrid>
-                <a:gridCol w="1842095"/>
-                <a:gridCol w="1576983"/>
-                <a:gridCol w="1838722"/>
+                <a:gridCol w="1706066"/>
+                <a:gridCol w="1848644"/>
+                <a:gridCol w="1703090"/>
               </a:tblGrid>
               <a:tr h="263634">
                 <a:tc>
@@ -13840,7 +13840,7 @@
                           <a:ea typeface="Malgun Gothic"/>
                           <a:cs typeface="Malgun Gothic"/>
                         </a:rPr>
-                        <a:t>글로 지정한 물체 상자</a:t>
+                        <a:t>텍스트로 지정한 물체의 상자</a:t>
                       </a:r>
                     </a:p>
                   </a:txBody>
@@ -14496,7 +14496,7 @@
                 <a:ea typeface="Malgun Gothic"/>
                 <a:cs typeface="Malgun Gothic"/>
               </a:rPr>
-              <a:t>단안 깊이로 근거리 높이를 채운다. 상대 깊이는 축척이 없다</a:t>
+              <a:t>단안 깊이로 근거리 높이를 채운다. 상대 깊이는 스케일이 없다</a:t>
             </a:r>
           </a:p>
         </p:txBody>
@@ -14841,7 +14841,7 @@
                 <a:ea typeface="Malgun Gothic"/>
                 <a:cs typeface="Malgun Gothic"/>
               </a:rPr>
-              <a:t> 오프라인에서 마스크·깊이 가짜 라벨을 만들어 작은 실시간 모델(검출기, TravNet)로 증류한다.</a:t>
+              <a:t> 오프라인에서 마스크·깊이 pseudo-label을 만들어 작은 실시간 모델(검출기, TravNet)로 증류한다.</a:t>
             </a:r>
           </a:p>
         </p:txBody>
@@ -15545,7 +15545,7 @@
                 <a:ea typeface="Malgun Gothic"/>
                 <a:cs typeface="Malgun Gothic"/>
               </a:rPr>
-              <a:t>상자에 투영되는 LiDAR 점으로 3D 중심. 바닥점은 폴백</a:t>
+              <a:t>검출 상자에 투영되는 LiDAR 점으로 3D 중심. 바닥점은 폴백</a:t>
             </a:r>
           </a:p>
         </p:txBody>
@@ -16713,7 +16713,7 @@
                 <a:ea typeface="Malgun Gothic"/>
                 <a:cs typeface="Malgun Gothic"/>
               </a:rPr>
-              <a:t>마지막 속도로 직진하는 기준선이 신경망 SOTA와 비슷하거나 낫다. 생성 예측(Trajectron++, MoFlow)은 상호작용이 문제가 될 때 본다.</a:t>
+              <a:t>마지막 속도로 직진하는 기준선이 신경망 SOTA와 비슷하거나 낫다. 생성 예측(Trajectron++, MoFlow)은 상호작용이 문제가 될 때 다룬다.</a:t>
             </a:r>
           </a:p>
         </p:txBody>
@@ -19294,7 +19294,7 @@
                 <a:ea typeface="Malgun Gothic"/>
                 <a:cs typeface="Malgun Gothic"/>
               </a:rPr>
-              <a:t>수평선별 conformal 문턱을 온라인으로 맞추고, MPC 해를 그 범위로 검사한다. 12명 정면 흐름 성공 100%·충돌 0%.</a:t>
+              <a:t>horizon별 conformal 임계값을 온라인으로 맞추고, MPC 해를 그 범위로 검사한다. 12명 정면 흐름 성공 100%·충돌 0%.</a:t>
             </a:r>
           </a:p>
         </p:txBody>
@@ -19680,7 +19680,7 @@
                 <a:ea typeface="Malgun Gothic"/>
                 <a:cs typeface="Malgun Gothic"/>
               </a:rPr>
-              <a:t>지도, 비용, 사람을 차례로 보고 우리가 잰 것으로 끝낸다</a:t>
+              <a:t>지도, 비용, 사람을 차례로 살펴보고 우리가 잰 것으로 끝낸다</a:t>
             </a:r>
           </a:p>
         </p:txBody>
@@ -20548,7 +20548,7 @@
                 <a:ea typeface="Malgun Gothic"/>
                 <a:cs typeface="Malgun Gothic"/>
               </a:rPr>
-              <a:t>시각 기반 모델 · 동적 장애물 (A.11–A.12)</a:t>
+              <a:t>비전 파운데이션 모델(VFM) · 동적 장애물 (A.11–A.12)</a:t>
             </a:r>
           </a:p>
         </p:txBody>
@@ -20589,7 +20589,7 @@
                 <a:ea typeface="Malgun Gothic"/>
                 <a:cs typeface="Malgun Gothic"/>
               </a:rPr>
-              <a:t>라벨 교사, 검출·추적·예측, 얼어붙기</a:t>
+              <a:t>라벨 교사, 검출·추적·예측, Freezing Robot Problem</a:t>
             </a:r>
           </a:p>
         </p:txBody>
@@ -21539,7 +21539,7 @@
                 <a:ea typeface="Malgun Gothic"/>
                 <a:cs typeface="Malgun Gothic"/>
               </a:rPr>
-              <a:t>한 가지 질문으로 묶는다. 보도 배달로봇이 무엇을 보고 무엇을 모르는지를 지도에 어떻게 적는가.</a:t>
+              <a:t>질문은 하나다. 보도 배달로봇이 무엇을 보고 무엇을 모르는지를 지도에 어떻게 적는가.</a:t>
             </a:r>
           </a:p>
         </p:txBody>
@@ -22798,7 +22798,7 @@
                 <a:ea typeface="Malgun Gothic"/>
                 <a:cs typeface="Malgun Gothic"/>
               </a:rPr>
-              <a:t>0.2 m 칸의 25% 분위수를 지면으로 두고 높이 문턱 하나로 판단한다. NUC 한 대로 돈다. 바퀴형 공개 기준이다.</a:t>
+              <a:t>0.2 m 칸의 25% 분위수를 지면으로 두고 높이 임계값 하나로 판단한다. NUC 한 대로 돈다. 바퀴형 공개 기준이다.</a:t>
             </a:r>
           </a:p>
         </p:txBody>
@@ -23171,7 +23171,7 @@
         </p:nvGraphicFramePr>
         <p:xfrm>
           <a:off x="711200" y="1361678"/>
-          <a:ext cx="10769600" cy="2305239"/>
+          <a:ext cx="10769601" cy="2305239"/>
         </p:xfrm>
         <a:graphic>
           <a:graphicData uri="http://schemas.openxmlformats.org/drawingml/2006/table">
@@ -23180,11 +23180,11 @@
                 <a:tableStyleId>{5C22544A-7EE6-4342-B048-85BDC9FD1C3A}</a:tableStyleId>
               </a:tblPr>
               <a:tblGrid>
-                <a:gridCol w="2128044"/>
-                <a:gridCol w="1723727"/>
-                <a:gridCol w="1939131"/>
-                <a:gridCol w="1996877"/>
-                <a:gridCol w="2981821"/>
+                <a:gridCol w="2048371"/>
+                <a:gridCol w="1659136"/>
+                <a:gridCol w="2269927"/>
+                <a:gridCol w="1922066"/>
+                <a:gridCol w="2870101"/>
               </a:tblGrid>
               <a:tr h="263634">
                 <a:tc>
@@ -23517,7 +23517,7 @@
                           <a:ea typeface="Malgun Gothic"/>
                           <a:cs typeface="Malgun Gothic"/>
                         </a:rPr>
-                        <a:t>초구 거리</a:t>
+                        <a:t>hypersphere 거리</a:t>
                       </a:r>
                     </a:p>
                   </a:txBody>
@@ -23737,7 +23737,7 @@
                           <a:ea typeface="Malgun Gothic"/>
                           <a:cs typeface="Malgun Gothic"/>
                         </a:rPr>
-                        <a:t>고유수용·IMU 점수</a:t>
+                        <a:t>proprioception·IMU 점수</a:t>
                       </a:r>
                     </a:p>
                   </a:txBody>
@@ -24225,7 +24225,7 @@
                           <a:ea typeface="Malgun Gothic"/>
                           <a:cs typeface="Malgun Gothic"/>
                         </a:rPr>
-                        <a:t>시뮬 발 디딤</a:t>
+                        <a:t>시뮬 foothold</a:t>
                       </a:r>
                     </a:p>
                   </a:txBody>
@@ -24366,7 +24366,7 @@
                 <a:ea typeface="Malgun Gothic"/>
                 <a:cs typeface="Malgun Gothic"/>
               </a:rPr>
-              <a:t> Orin에서 잰 것은 SyNeT 하나뿐이다. 입력이 기하인 GSAT가 TravNet에 가장 가깝다.</a:t>
+              <a:t> Orin에서 잰 것은 SyNeT 하나뿐이다. 입력이 기하인 GSAT이 TravNet에 가장 가깝다.</a:t>
             </a:r>
           </a:p>
         </p:txBody>
@@ -24586,7 +24586,7 @@
         </p:nvGraphicFramePr>
         <p:xfrm>
           <a:off x="711200" y="1361678"/>
-          <a:ext cx="10769599" cy="2049701"/>
+          <a:ext cx="10769600" cy="2049701"/>
         </p:xfrm>
         <a:graphic>
           <a:graphicData uri="http://schemas.openxmlformats.org/drawingml/2006/table">
@@ -24595,11 +24595,11 @@
                 <a:tableStyleId>{5C22544A-7EE6-4342-B048-85BDC9FD1C3A}</a:tableStyleId>
               </a:tblPr>
               <a:tblGrid>
-                <a:gridCol w="3110309"/>
-                <a:gridCol w="1752104"/>
-                <a:gridCol w="2384524"/>
-                <a:gridCol w="1726803"/>
-                <a:gridCol w="1795859"/>
+                <a:gridCol w="3026668"/>
+                <a:gridCol w="1704975"/>
+                <a:gridCol w="2609949"/>
+                <a:gridCol w="1680369"/>
+                <a:gridCol w="1747639"/>
               </a:tblGrid>
               <a:tr h="263634">
                 <a:tc>
@@ -25030,7 +25030,7 @@
                           <a:ea typeface="Malgun Gothic"/>
                           <a:cs typeface="Malgun Gothic"/>
                         </a:rPr>
-                        <a:t>확산으로 못 본 voxel 생성</a:t>
+                        <a:t>diffusion으로 못 본 voxel 생성</a:t>
                       </a:r>
                     </a:p>
                   </a:txBody>
@@ -25518,7 +25518,7 @@
                           <a:ea typeface="Malgun Gothic"/>
                           <a:cs typeface="Malgun Gothic"/>
                         </a:rPr>
-                        <a:t>수평선별 conformal PI</a:t>
+                        <a:t>horizon별 conformal PI</a:t>
                       </a:r>
                     </a:p>
                   </a:txBody>
@@ -26389,7 +26389,7 @@
                 <a:ea typeface="Malgun Gothic"/>
                 <a:cs typeface="Malgun Gothic"/>
               </a:rPr>
-              <a:t>GSAT는 전부 음성으로 두면 F1이 떨어진다고 보였다. travplan은 그 칸을 손실에서 뺀다.</a:t>
+              <a:t>GSAT은 전부 음성으로 두면 F1이 떨어진다는 것을 보여 줬다. travplan은 그 칸을 손실에서 뺀다.</a:t>
             </a:r>
           </a:p>
         </p:txBody>
@@ -26851,7 +26851,7 @@
                 <a:ea typeface="Malgun Gothic"/>
                 <a:cs typeface="Malgun Gothic"/>
               </a:rPr>
-              <a:t>자세 분산, 비용 지도, 간격 문턱. travplan은 </a:t>
+              <a:t>자세 분산, costmap, 구간 임계값. travplan은 </a:t>
             </a:r>
             <a:r>
               <a:rPr sz="1000" b="0" i="0">
@@ -26956,7 +26956,7 @@
                 <a:ea typeface="Malgun Gothic"/>
                 <a:cs typeface="Malgun Gothic"/>
               </a:rPr>
-              <a:t> 셋째(큰 시각 모델 고정)만 아직이고, 영상 TravNet을 들일 때의 일이다.</a:t>
+              <a:t> 셋째(큰 시각 모델 고정)만 아직이고, 영상 TravNet을 도입할 때의 일이다.</a:t>
             </a:r>
           </a:p>
         </p:txBody>
@@ -27079,7 +27079,7 @@
         </p:nvGraphicFramePr>
         <p:xfrm>
           <a:off x="711200" y="1361678"/>
-          <a:ext cx="10769601" cy="1794163"/>
+          <a:ext cx="10769600" cy="1794163"/>
         </p:xfrm>
         <a:graphic>
           <a:graphicData uri="http://schemas.openxmlformats.org/drawingml/2006/table">
@@ -27088,9 +27088,9 @@
                 <a:tableStyleId>{5C22544A-7EE6-4342-B048-85BDC9FD1C3A}</a:tableStyleId>
               </a:tblPr>
               <a:tblGrid>
-                <a:gridCol w="1739702"/>
-                <a:gridCol w="4911527"/>
-                <a:gridCol w="4118372"/>
+                <a:gridCol w="1639193"/>
+                <a:gridCol w="5249962"/>
+                <a:gridCol w="3880445"/>
               </a:tblGrid>
               <a:tr h="263634">
                 <a:tc>
@@ -27205,7 +27205,7 @@
                           <a:ea typeface="Malgun Gothic"/>
                           <a:cs typeface="Malgun Gothic"/>
                         </a:rPr>
-                        <a:t>합성(SyNeT) · 초구(GSAT) · nnPU(LHT)</a:t>
+                        <a:t>합성(SyNeT) · hypersphere(GSAT) · nnPU(LHT)</a:t>
                       </a:r>
                     </a:p>
                   </a:txBody>
@@ -27353,7 +27353,7 @@
                           <a:ea typeface="Malgun Gothic"/>
                           <a:cs typeface="Malgun Gothic"/>
                         </a:rPr>
-                        <a:t>(가) 지형 관측 부족 · (나) 모델 epistemic · (다) 예측 포함률</a:t>
+                        <a:t>(가) 지형 관측 부족 · (나) 모델 epistemic · (다) 예측 구간 coverage</a:t>
                       </a:r>
                     </a:p>
                   </a:txBody>
@@ -28369,7 +28369,7 @@
                 <a:ea typeface="Malgun Gothic"/>
                 <a:cs typeface="Malgun Gothic"/>
               </a:rPr>
-              <a:t>Fourier 맞춤, 공간 상관 공분산(무거움)</a:t>
+              <a:t>Fourier 피팅, 공간 상관 공분산(무거움)</a:t>
             </a:r>
           </a:p>
         </p:txBody>
@@ -28412,7 +28412,7 @@
                 <a:ea typeface="Malgun Gothic"/>
                 <a:cs typeface="Malgun Gothic"/>
               </a:rPr>
-              <a:t>VLM 비용 지도(계획 시간)</a:t>
+              <a:t>VLM costmap(계획 시간)</a:t>
             </a:r>
           </a:p>
         </p:txBody>
@@ -30293,7 +30293,7 @@
                 <a:ea typeface="Malgun Gothic"/>
                 <a:cs typeface="Malgun Gothic"/>
               </a:rPr>
-              <a:t>왜 지나</a:t>
+              <a:t>왜 못 잡나</a:t>
             </a:r>
           </a:p>
         </p:txBody>
@@ -34097,7 +34097,7 @@
         <p:spPr>
           <a:xfrm>
             <a:off x="711200" y="781050"/>
-            <a:ext cx="11118088" cy="554335"/>
+            <a:ext cx="11118088" cy="1057870"/>
           </a:xfrm>
           <a:prstGeom prst="rect">
             <a:avLst/>
@@ -34124,7 +34124,7 @@
                 <a:ea typeface="Malgun Gothic"/>
                 <a:cs typeface="Malgun Gothic"/>
               </a:rPr>
-              <a:t>둘레 1.5 m 못 본 칸을 치명으로 두고, 그 대가는 전면 스테레오가 지운다</a:t>
+              <a:t>둘레 1.5 m의 못 본 칸을 치명으로 두고, 그 대가는 전면 스테레오가 상쇄한다</a:t>
             </a:r>
           </a:p>
         </p:txBody>
@@ -34138,7 +34138,7 @@
           <p:nvPr/>
         </p:nvGraphicFramePr>
         <p:xfrm>
-          <a:off x="711200" y="1361678"/>
+          <a:off x="711200" y="1764506"/>
           <a:ext cx="5257799" cy="1283087"/>
         </p:xfrm>
         <a:graphic>
@@ -34655,7 +34655,7 @@
         </p:nvSpPr>
         <p:spPr>
           <a:xfrm>
-            <a:off x="6223000" y="1361678"/>
+            <a:off x="6223000" y="1764506"/>
             <a:ext cx="5257800" cy="820341"/>
           </a:xfrm>
           <a:prstGeom prst="roundRect">
@@ -34686,7 +34686,7 @@
         </p:nvSpPr>
         <p:spPr>
           <a:xfrm>
-            <a:off x="6223000" y="1361678"/>
+            <a:off x="6223000" y="1764506"/>
             <a:ext cx="5257800" cy="6350"/>
           </a:xfrm>
           <a:prstGeom prst="rect">
@@ -34715,7 +34715,7 @@
         </p:nvSpPr>
         <p:spPr>
           <a:xfrm>
-            <a:off x="11474450" y="1361678"/>
+            <a:off x="11474450" y="1764506"/>
             <a:ext cx="6350" cy="820341"/>
           </a:xfrm>
           <a:prstGeom prst="rect">
@@ -34744,7 +34744,7 @@
         </p:nvSpPr>
         <p:spPr>
           <a:xfrm>
-            <a:off x="6223000" y="2175669"/>
+            <a:off x="6223000" y="2578497"/>
             <a:ext cx="5257800" cy="6350"/>
           </a:xfrm>
           <a:prstGeom prst="rect">
@@ -34773,7 +34773,7 @@
         </p:nvSpPr>
         <p:spPr>
           <a:xfrm>
-            <a:off x="6223000" y="1361678"/>
+            <a:off x="6223000" y="1764506"/>
             <a:ext cx="50800" cy="820341"/>
           </a:xfrm>
           <a:prstGeom prst="roundRect">
@@ -34804,7 +34804,7 @@
         </p:nvSpPr>
         <p:spPr>
           <a:xfrm>
-            <a:off x="6438900" y="1507728"/>
+            <a:off x="6438900" y="1910556"/>
             <a:ext cx="5041964" cy="339651"/>
           </a:xfrm>
           <a:prstGeom prst="rect">
@@ -34845,7 +34845,7 @@
         </p:nvSpPr>
         <p:spPr>
           <a:xfrm>
-            <a:off x="6438900" y="1815009"/>
+            <a:off x="6438900" y="2217837"/>
             <a:ext cx="5041964" cy="327000"/>
           </a:xfrm>
           <a:prstGeom prst="rect">
@@ -34886,7 +34886,7 @@
         </p:nvSpPr>
         <p:spPr>
           <a:xfrm>
-            <a:off x="6223000" y="2296319"/>
+            <a:off x="6223000" y="2699147"/>
             <a:ext cx="5257800" cy="820341"/>
           </a:xfrm>
           <a:prstGeom prst="roundRect">
@@ -34917,7 +34917,7 @@
         </p:nvSpPr>
         <p:spPr>
           <a:xfrm>
-            <a:off x="6223000" y="2296319"/>
+            <a:off x="6223000" y="2699147"/>
             <a:ext cx="5257800" cy="6350"/>
           </a:xfrm>
           <a:prstGeom prst="rect">
@@ -34946,7 +34946,7 @@
         </p:nvSpPr>
         <p:spPr>
           <a:xfrm>
-            <a:off x="11474450" y="2296319"/>
+            <a:off x="11474450" y="2699147"/>
             <a:ext cx="6350" cy="820341"/>
           </a:xfrm>
           <a:prstGeom prst="rect">
@@ -34975,7 +34975,7 @@
         </p:nvSpPr>
         <p:spPr>
           <a:xfrm>
-            <a:off x="6223000" y="3110309"/>
+            <a:off x="6223000" y="3513138"/>
             <a:ext cx="5257800" cy="6350"/>
           </a:xfrm>
           <a:prstGeom prst="rect">
@@ -35004,7 +35004,7 @@
         </p:nvSpPr>
         <p:spPr>
           <a:xfrm>
-            <a:off x="6223000" y="2296319"/>
+            <a:off x="6223000" y="2699147"/>
             <a:ext cx="50800" cy="820341"/>
           </a:xfrm>
           <a:prstGeom prst="roundRect">
@@ -35035,7 +35035,7 @@
         </p:nvSpPr>
         <p:spPr>
           <a:xfrm>
-            <a:off x="6438900" y="2442369"/>
+            <a:off x="6438900" y="2845197"/>
             <a:ext cx="5041964" cy="339651"/>
           </a:xfrm>
           <a:prstGeom prst="rect">
@@ -35063,7 +35063,7 @@
                 <a:ea typeface="Malgun Gothic"/>
                 <a:cs typeface="Malgun Gothic"/>
               </a:rPr>
-              <a:t>스테레오의 값</a:t>
+              <a:t>스테레오의 가치</a:t>
             </a:r>
           </a:p>
         </p:txBody>
@@ -35076,7 +35076,7 @@
         </p:nvSpPr>
         <p:spPr>
           <a:xfrm>
-            <a:off x="6438900" y="2749649"/>
+            <a:off x="6438900" y="3152477"/>
             <a:ext cx="5041964" cy="327000"/>
           </a:xfrm>
           <a:prstGeom prst="rect">
@@ -35117,7 +35117,7 @@
         </p:nvSpPr>
         <p:spPr>
           <a:xfrm>
-            <a:off x="711200" y="3294459"/>
+            <a:off x="711200" y="3697288"/>
             <a:ext cx="10769600" cy="1905000"/>
           </a:xfrm>
           <a:prstGeom prst="roundRect">
@@ -35158,7 +35158,7 @@
         </p:blipFill>
         <p:spPr>
           <a:xfrm>
-            <a:off x="3218356" y="3294459"/>
+            <a:off x="3218356" y="3697288"/>
             <a:ext cx="5755287" cy="1905000"/>
           </a:xfrm>
           <a:prstGeom prst="rect">
@@ -35174,7 +35174,7 @@
         </p:nvSpPr>
         <p:spPr>
           <a:xfrm>
-            <a:off x="711200" y="5262959"/>
+            <a:off x="711200" y="5665788"/>
             <a:ext cx="11118088" cy="273050"/>
           </a:xfrm>
           <a:prstGeom prst="rect">
@@ -35215,7 +35215,7 @@
         </p:nvSpPr>
         <p:spPr>
           <a:xfrm>
-            <a:off x="711200" y="5618559"/>
+            <a:off x="711200" y="6021388"/>
             <a:ext cx="10769600" cy="502543"/>
           </a:xfrm>
           <a:prstGeom prst="roundRect">
@@ -35246,7 +35246,7 @@
         </p:nvSpPr>
         <p:spPr>
           <a:xfrm>
-            <a:off x="889000" y="5745559"/>
+            <a:off x="889000" y="6148388"/>
             <a:ext cx="10751820" cy="361479"/>
           </a:xfrm>
           <a:prstGeom prst="rect">
@@ -36344,7 +36344,7 @@
                 <a:ea typeface="Malgun Gothic"/>
                 <a:cs typeface="Malgun Gothic"/>
               </a:rPr>
-              <a:t>고치기 전 실패 장면, 포트홀 치명 띠의 후퇴, 권장 L1 레벨 3 치명 수(4 지형 × seed 0–9 × 오프셋 3)</a:t>
+              <a:t>고치기 전 실패 장면, 포트홀 치명 영역 경계의 후퇴, 권장 L1 레벨 3 치명 수(4 지형 × seed 0–9 × 오프셋 3)</a:t>
             </a:r>
           </a:p>
         </p:txBody>
@@ -36573,7 +36573,7 @@
                 <a:ea typeface="Malgun Gothic"/>
                 <a:cs typeface="Malgun Gothic"/>
               </a:rPr>
-              <a:t>레벨 3 치명 80건 중 78건은 belief가 치명 띠를 안쪽에 그림</a:t>
+              <a:t>레벨 3 치명 80건 중 78건은 belief가 치명 영역을 안쪽에 그림</a:t>
             </a:r>
           </a:p>
         </p:txBody>
@@ -38331,7 +38331,7 @@
                 <a:ea typeface="Malgun Gothic"/>
                 <a:cs typeface="Malgun Gothic"/>
               </a:rPr>
-              <a:t>매퍼의 순서 의존 넷을 닫아 L1이 비트 단위로 재현된다(TP-0098).</a:t>
+              <a:t>매퍼의 순서 의존성 네 곳을 없애 L1이 비트 단위로 재현된다(TP-0098).</a:t>
             </a:r>
           </a:p>
         </p:txBody>
@@ -39162,7 +39162,7 @@
                           <a:ea typeface="Malgun Gothic"/>
                           <a:cs typeface="Malgun Gothic"/>
                         </a:rPr>
-                        <a:t>직전에 모든 표본이 hard 벌점에 걸림</a:t>
+                        <a:t>직전에 모든 샘플이 hard 페널티에 걸림</a:t>
                       </a:r>
                     </a:p>
                   </a:txBody>
@@ -39286,7 +39286,7 @@
                           <a:ea typeface="Malgun Gothic"/>
                           <a:cs typeface="Malgun Gothic"/>
                         </a:rPr>
-                        <a:t>등급화 벌점 </a:t>
+                        <a:t>등급화 페널티 </a:t>
                       </a:r>
                       <a:r>
                         <a:rPr sz="850" b="0" i="0">
@@ -46098,7 +46098,7 @@
                           <a:ea typeface="Malgun Gothic"/>
                           <a:cs typeface="Malgun Gothic"/>
                         </a:rPr>
-                        <a:t>시각 기반 모델</a:t>
+                        <a:t>VFM</a:t>
                       </a:r>
                     </a:p>
                   </a:txBody>
@@ -47733,7 +47733,7 @@
                 <a:ea typeface="Malgun Gothic"/>
                 <a:cs typeface="Malgun Gothic"/>
               </a:rPr>
-              <a:t> 시각 기반 모델은 라벨 교사로, 자동차 occupancy와 world model은 표현 설계 참고로 쓴다.</a:t>
+              <a:t> VFM은 라벨 교사로, 자동차 occupancy와 world model은 표현 설계 참고로 쓴다.</a:t>
             </a:r>
           </a:p>
         </p:txBody>
@@ -47841,7 +47841,7 @@
                 <a:ea typeface="Malgun Gothic"/>
                 <a:cs typeface="Malgun Gothic"/>
               </a:rPr>
-              <a:t>시각 기반 모델, 동적 장애물, 최근 연구, 센서</a:t>
+              <a:t>비전 파운데이션 모델, 동적 장애물, 최근 연구, 센서</a:t>
             </a:r>
           </a:p>
         </p:txBody>
@@ -49034,7 +49034,7 @@
                 <a:ea typeface="Malgun Gothic"/>
                 <a:cs typeface="Malgun Gothic"/>
               </a:rPr>
-              <a:t>픽셀별 깊이 분포로 특징을 들어 BEV 격자에 뿌린다</a:t>
+              <a:t>픽셀별 깊이 분포로 특징을 lift해 BEV 격자에 splat한다</a:t>
             </a:r>
           </a:p>
         </p:txBody>
@@ -49613,7 +49613,7 @@
         <p:spPr>
           <a:xfrm>
             <a:off x="8208367" y="2132509"/>
-            <a:ext cx="3219310" cy="327000"/>
+            <a:ext cx="3219310" cy="603200"/>
           </a:xfrm>
           <a:prstGeom prst="rect">
             <a:avLst/>
@@ -49640,7 +49640,7 @@
                 <a:ea typeface="Malgun Gothic"/>
                 <a:cs typeface="Malgun Gothic"/>
               </a:rPr>
-              <a:t>2D 합성곱만 쓰고 채널을 높이로 바꾼다. 배포 친화</a:t>
+              <a:t>2D convolution만 쓰고 채널을 높이로 바꾼다. 배포 친화적</a:t>
             </a:r>
           </a:p>
         </p:txBody>
@@ -52532,7 +52532,7 @@
         </p:nvGraphicFramePr>
         <p:xfrm>
           <a:off x="711200" y="1361678"/>
-          <a:ext cx="10769599" cy="1794163"/>
+          <a:ext cx="10769600" cy="1794163"/>
         </p:xfrm>
         <a:graphic>
           <a:graphicData uri="http://schemas.openxmlformats.org/drawingml/2006/table">
@@ -52541,11 +52541,11 @@
                 <a:tableStyleId>{5C22544A-7EE6-4342-B048-85BDC9FD1C3A}</a:tableStyleId>
               </a:tblPr>
               <a:tblGrid>
-                <a:gridCol w="2297807"/>
-                <a:gridCol w="1165721"/>
-                <a:gridCol w="2878931"/>
-                <a:gridCol w="2099766"/>
-                <a:gridCol w="2327374"/>
+                <a:gridCol w="2264668"/>
+                <a:gridCol w="1148953"/>
+                <a:gridCol w="2837359"/>
+                <a:gridCol w="2069405"/>
+                <a:gridCol w="2449215"/>
               </a:tblGrid>
               <a:tr h="263634">
                 <a:tc>
@@ -53035,7 +53035,7 @@
                           <a:ea typeface="Malgun Gothic"/>
                           <a:cs typeface="Malgun Gothic"/>
                         </a:rPr>
-                        <a:t>TP-0048 규칙 설계에 읽는다</a:t>
+                        <a:t>TP-0048 규칙 설계에 참고한다</a:t>
                       </a:r>
                     </a:p>
                   </a:txBody>
